--- a/Quantrix ppt.pptx
+++ b/Quantrix ppt.pptx
@@ -7760,7 +7760,7 @@
           <a:p>
             <a:fld id="{1D7F975C-B0B1-41B6-99E7-28B1B3F6B837}" type="datetimeFigureOut">
               <a:rPr lang="en-IN" smtClean="0"/>
-              <a:t>11-08-2026</a:t>
+              <a:t>12-08-2026</a:t>
             </a:fld>
             <a:endParaRPr lang="en-IN"/>
           </a:p>
@@ -8340,7 +8340,7 @@
           <a:p>
             <a:fld id="{3982C70B-F866-412B-B78F-D1F10E997D88}" type="datetimeFigureOut">
               <a:rPr lang="en-IN" smtClean="0"/>
-              <a:t>11-08-2026</a:t>
+              <a:t>12-08-2026</a:t>
             </a:fld>
             <a:endParaRPr lang="en-IN"/>
           </a:p>
@@ -8692,7 +8692,7 @@
           <a:p>
             <a:fld id="{3982C70B-F866-412B-B78F-D1F10E997D88}" type="datetimeFigureOut">
               <a:rPr lang="en-IN" smtClean="0"/>
-              <a:t>11-08-2026</a:t>
+              <a:t>12-08-2026</a:t>
             </a:fld>
             <a:endParaRPr lang="en-IN"/>
           </a:p>
@@ -9006,7 +9006,7 @@
           <a:p>
             <a:fld id="{3982C70B-F866-412B-B78F-D1F10E997D88}" type="datetimeFigureOut">
               <a:rPr lang="en-IN" smtClean="0"/>
-              <a:t>11-08-2026</a:t>
+              <a:t>12-08-2026</a:t>
             </a:fld>
             <a:endParaRPr lang="en-IN"/>
           </a:p>
@@ -9269,7 +9269,7 @@
           <a:p>
             <a:fld id="{3982C70B-F866-412B-B78F-D1F10E997D88}" type="datetimeFigureOut">
               <a:rPr lang="en-IN" smtClean="0"/>
-              <a:t>11-08-2026</a:t>
+              <a:t>12-08-2026</a:t>
             </a:fld>
             <a:endParaRPr lang="en-IN"/>
           </a:p>
@@ -9588,7 +9588,7 @@
           <a:p>
             <a:fld id="{3982C70B-F866-412B-B78F-D1F10E997D88}" type="datetimeFigureOut">
               <a:rPr lang="en-IN" smtClean="0"/>
-              <a:t>11-08-2026</a:t>
+              <a:t>12-08-2026</a:t>
             </a:fld>
             <a:endParaRPr lang="en-IN"/>
           </a:p>
@@ -9909,7 +9909,7 @@
           <a:p>
             <a:fld id="{3982C70B-F866-412B-B78F-D1F10E997D88}" type="datetimeFigureOut">
               <a:rPr lang="en-IN" smtClean="0"/>
-              <a:t>11-08-2026</a:t>
+              <a:t>12-08-2026</a:t>
             </a:fld>
             <a:endParaRPr lang="en-IN"/>
           </a:p>
@@ -10218,7 +10218,7 @@
           <a:p>
             <a:fld id="{3982C70B-F866-412B-B78F-D1F10E997D88}" type="datetimeFigureOut">
               <a:rPr lang="en-IN" smtClean="0"/>
-              <a:t>11-08-2026</a:t>
+              <a:t>12-08-2026</a:t>
             </a:fld>
             <a:endParaRPr lang="en-IN"/>
           </a:p>
@@ -10725,7 +10725,7 @@
           <a:p>
             <a:fld id="{3982C70B-F866-412B-B78F-D1F10E997D88}" type="datetimeFigureOut">
               <a:rPr lang="en-IN" smtClean="0"/>
-              <a:t>11-08-2026</a:t>
+              <a:t>12-08-2026</a:t>
             </a:fld>
             <a:endParaRPr lang="en-IN"/>
           </a:p>
@@ -10970,7 +10970,7 @@
           <a:p>
             <a:fld id="{3982C70B-F866-412B-B78F-D1F10E997D88}" type="datetimeFigureOut">
               <a:rPr lang="en-IN" smtClean="0"/>
-              <a:t>11-08-2026</a:t>
+              <a:t>12-08-2026</a:t>
             </a:fld>
             <a:endParaRPr lang="en-IN"/>
           </a:p>
@@ -11329,7 +11329,7 @@
           <a:p>
             <a:fld id="{3982C70B-F866-412B-B78F-D1F10E997D88}" type="datetimeFigureOut">
               <a:rPr lang="en-IN" smtClean="0"/>
-              <a:t>11-08-2026</a:t>
+              <a:t>12-08-2026</a:t>
             </a:fld>
             <a:endParaRPr lang="en-IN"/>
           </a:p>
@@ -11821,7 +11821,7 @@
           <a:p>
             <a:fld id="{3982C70B-F866-412B-B78F-D1F10E997D88}" type="datetimeFigureOut">
               <a:rPr lang="en-IN" smtClean="0"/>
-              <a:t>11-08-2026</a:t>
+              <a:t>12-08-2026</a:t>
             </a:fld>
             <a:endParaRPr lang="en-IN"/>
           </a:p>
@@ -12097,7 +12097,7 @@
           <a:p>
             <a:fld id="{3982C70B-F866-412B-B78F-D1F10E997D88}" type="datetimeFigureOut">
               <a:rPr lang="en-IN" smtClean="0"/>
-              <a:t>11-08-2026</a:t>
+              <a:t>12-08-2026</a:t>
             </a:fld>
             <a:endParaRPr lang="en-IN"/>
           </a:p>
@@ -12432,7 +12432,7 @@
           <a:p>
             <a:fld id="{3982C70B-F866-412B-B78F-D1F10E997D88}" type="datetimeFigureOut">
               <a:rPr lang="en-IN" smtClean="0"/>
-              <a:t>11-08-2026</a:t>
+              <a:t>12-08-2026</a:t>
             </a:fld>
             <a:endParaRPr lang="en-IN"/>
           </a:p>
@@ -12777,7 +12777,7 @@
           <a:p>
             <a:fld id="{3982C70B-F866-412B-B78F-D1F10E997D88}" type="datetimeFigureOut">
               <a:rPr lang="en-IN" smtClean="0"/>
-              <a:t>11-08-2026</a:t>
+              <a:t>12-08-2026</a:t>
             </a:fld>
             <a:endParaRPr lang="en-IN"/>
           </a:p>
@@ -13030,7 +13030,7 @@
           <a:p>
             <a:fld id="{3982C70B-F866-412B-B78F-D1F10E997D88}" type="datetimeFigureOut">
               <a:rPr lang="en-IN" smtClean="0"/>
-              <a:t>11-08-2026</a:t>
+              <a:t>12-08-2026</a:t>
             </a:fld>
             <a:endParaRPr lang="en-IN"/>
           </a:p>
@@ -13353,7 +13353,7 @@
           <a:p>
             <a:fld id="{3982C70B-F866-412B-B78F-D1F10E997D88}" type="datetimeFigureOut">
               <a:rPr lang="en-IN" smtClean="0"/>
-              <a:t>11-08-2026</a:t>
+              <a:t>12-08-2026</a:t>
             </a:fld>
             <a:endParaRPr lang="en-IN"/>
           </a:p>
@@ -13817,7 +13817,7 @@
           <a:p>
             <a:fld id="{3982C70B-F866-412B-B78F-D1F10E997D88}" type="datetimeFigureOut">
               <a:rPr lang="en-IN" smtClean="0"/>
-              <a:t>11-08-2026</a:t>
+              <a:t>12-08-2026</a:t>
             </a:fld>
             <a:endParaRPr lang="en-IN"/>
           </a:p>
@@ -13930,7 +13930,7 @@
           <a:p>
             <a:fld id="{3982C70B-F866-412B-B78F-D1F10E997D88}" type="datetimeFigureOut">
               <a:rPr lang="en-IN" smtClean="0"/>
-              <a:t>11-08-2026</a:t>
+              <a:t>12-08-2026</a:t>
             </a:fld>
             <a:endParaRPr lang="en-IN"/>
           </a:p>
@@ -14163,7 +14163,7 @@
           <a:p>
             <a:fld id="{3982C70B-F866-412B-B78F-D1F10E997D88}" type="datetimeFigureOut">
               <a:rPr lang="en-IN" smtClean="0"/>
-              <a:t>11-08-2026</a:t>
+              <a:t>12-08-2026</a:t>
             </a:fld>
             <a:endParaRPr lang="en-IN"/>
           </a:p>
@@ -14533,7 +14533,7 @@
           <a:p>
             <a:fld id="{3982C70B-F866-412B-B78F-D1F10E997D88}" type="datetimeFigureOut">
               <a:rPr lang="en-IN" smtClean="0"/>
-              <a:t>11-08-2026</a:t>
+              <a:t>12-08-2026</a:t>
             </a:fld>
             <a:endParaRPr lang="en-IN"/>
           </a:p>
@@ -14827,7 +14827,7 @@
           <a:p>
             <a:fld id="{3982C70B-F866-412B-B78F-D1F10E997D88}" type="datetimeFigureOut">
               <a:rPr lang="en-IN" smtClean="0"/>
-              <a:t>11-08-2026</a:t>
+              <a:t>12-08-2026</a:t>
             </a:fld>
             <a:endParaRPr lang="en-IN"/>
           </a:p>
@@ -15129,7 +15129,7 @@
           <a:p>
             <a:fld id="{3982C70B-F866-412B-B78F-D1F10E997D88}" type="datetimeFigureOut">
               <a:rPr lang="en-IN" smtClean="0"/>
-              <a:t>11-08-2026</a:t>
+              <a:t>12-08-2026</a:t>
             </a:fld>
             <a:endParaRPr lang="en-IN"/>
           </a:p>
@@ -15425,7 +15425,7 @@
           <a:p>
             <a:fld id="{3982C70B-F866-412B-B78F-D1F10E997D88}" type="datetimeFigureOut">
               <a:rPr lang="en-IN" smtClean="0"/>
-              <a:t>11-08-2026</a:t>
+              <a:t>12-08-2026</a:t>
             </a:fld>
             <a:endParaRPr lang="en-IN"/>
           </a:p>
@@ -15713,7 +15713,7 @@
           <a:p>
             <a:fld id="{3982C70B-F866-412B-B78F-D1F10E997D88}" type="datetimeFigureOut">
               <a:rPr lang="en-IN" smtClean="0"/>
-              <a:t>11-08-2026</a:t>
+              <a:t>12-08-2026</a:t>
             </a:fld>
             <a:endParaRPr lang="en-IN"/>
           </a:p>
@@ -16028,7 +16028,7 @@
           <a:p>
             <a:fld id="{3982C70B-F866-412B-B78F-D1F10E997D88}" type="datetimeFigureOut">
               <a:rPr lang="en-IN" smtClean="0"/>
-              <a:t>11-08-2026</a:t>
+              <a:t>12-08-2026</a:t>
             </a:fld>
             <a:endParaRPr lang="en-IN"/>
           </a:p>
@@ -16429,7 +16429,7 @@
           <a:p>
             <a:fld id="{3982C70B-F866-412B-B78F-D1F10E997D88}" type="datetimeFigureOut">
               <a:rPr lang="en-IN" smtClean="0"/>
-              <a:t>11-08-2026</a:t>
+              <a:t>12-08-2026</a:t>
             </a:fld>
             <a:endParaRPr lang="en-IN"/>
           </a:p>
@@ -16737,7 +16737,7 @@
           <a:p>
             <a:fld id="{3982C70B-F866-412B-B78F-D1F10E997D88}" type="datetimeFigureOut">
               <a:rPr lang="en-IN" smtClean="0"/>
-              <a:t>11-08-2026</a:t>
+              <a:t>12-08-2026</a:t>
             </a:fld>
             <a:endParaRPr lang="en-IN"/>
           </a:p>
@@ -17088,7 +17088,7 @@
           <a:p>
             <a:fld id="{3982C70B-F866-412B-B78F-D1F10E997D88}" type="datetimeFigureOut">
               <a:rPr lang="en-IN" smtClean="0"/>
-              <a:t>11-08-2026</a:t>
+              <a:t>12-08-2026</a:t>
             </a:fld>
             <a:endParaRPr lang="en-IN"/>
           </a:p>
@@ -17435,7 +17435,7 @@
           <a:p>
             <a:fld id="{3982C70B-F866-412B-B78F-D1F10E997D88}" type="datetimeFigureOut">
               <a:rPr lang="en-IN" smtClean="0"/>
-              <a:t>11-08-2026</a:t>
+              <a:t>12-08-2026</a:t>
             </a:fld>
             <a:endParaRPr lang="en-IN"/>
           </a:p>
@@ -21743,7 +21743,7 @@
               <a:buAutoNum type="arabicPeriod"/>
             </a:pPr>
             <a:r>
-              <a:rPr lang="en-IN" sz="2100"/>
+              <a:rPr lang="en-IN" sz="2100" dirty="0"/>
               <a:t>Prioritize City Hotel in your implementation sequencing</a:t>
             </a:r>
           </a:p>
@@ -21753,7 +21753,7 @@
               <a:buAutoNum type="arabicPeriod"/>
             </a:pPr>
             <a:r>
-              <a:rPr lang="en-IN" sz="2100"/>
+              <a:rPr lang="en-IN" sz="2100" dirty="0"/>
               <a:t>charge the card at time of booking, not at check-in, so "non-refundable" has real teeth. (Fixes Non-Refundable cancels)</a:t>
             </a:r>
           </a:p>
@@ -21763,8 +21763,16 @@
               <a:buAutoNum type="arabicPeriod"/>
             </a:pPr>
             <a:r>
-              <a:rPr lang="en-IN" sz="2100"/>
-              <a:t>Auto-flag at booking: if previous_cancellations &gt; 0, require prepayment or a mandatory confirmation call before the reservation is finalized. (Most cancels by people already cancelled)</a:t>
+              <a:rPr lang="en-IN" sz="2100" dirty="0"/>
+              <a:t>Auto-flag at booking: if </a:t>
+            </a:r>
+            <a:r>
+              <a:rPr lang="en-IN" sz="2100" dirty="0" err="1"/>
+              <a:t>previous_cancellations</a:t>
+            </a:r>
+            <a:r>
+              <a:rPr lang="en-IN" sz="2100" dirty="0"/>
+              <a:t> &gt; 0, require prepayment or a mandatory confirmation call before the reservation is finalized. (Most cancels by people already cancelled)</a:t>
             </a:r>
           </a:p>
           <a:p>
@@ -21773,21 +21781,21 @@
               <a:buAutoNum type="arabicPeriod"/>
             </a:pPr>
             <a:r>
-              <a:rPr lang="en-IN" sz="2100"/>
+              <a:rPr lang="en-IN" sz="2100" dirty="0"/>
               <a:t>For Groups: </a:t>
             </a:r>
           </a:p>
           <a:p>
             <a:pPr lvl="1"/>
             <a:r>
-              <a:rPr lang="en-IN" sz="2100"/>
+              <a:rPr lang="en-IN" sz="2100" dirty="0"/>
               <a:t>Tiered deposit by group size: e.g., 20% deposit for 5+ rooms, scaling up for larger blocks. </a:t>
             </a:r>
           </a:p>
           <a:p>
             <a:pPr lvl="1"/>
             <a:r>
-              <a:rPr lang="en-IN" sz="2100"/>
+              <a:rPr lang="en-IN" sz="2100" dirty="0"/>
               <a:t>Mandatory reconfirmation 14–21 days before arrival — group organizers often lose track of headcount changes.</a:t>
             </a:r>
           </a:p>
@@ -21797,7 +21805,7 @@
               <a:buAutoNum type="arabicPeriod"/>
             </a:pPr>
             <a:r>
-              <a:rPr lang="en-IN" sz="2100"/>
+              <a:rPr lang="en-IN" sz="2100" dirty="0"/>
               <a:t>Frame it as a value-add, not a warning — "confirm your stay to unlock late checkout" — encourages engagement without alarming genuine guests.</a:t>
             </a:r>
           </a:p>
@@ -21807,7 +21815,7 @@
               <a:buAutoNum type="arabicPeriod"/>
             </a:pPr>
             <a:r>
-              <a:rPr lang="en-IN" sz="2100"/>
+              <a:rPr lang="en-IN" sz="2100" dirty="0"/>
               <a:t>The real fix is treating "City Hotel + TA/TO + Transient" as one combined risk profile. </a:t>
             </a:r>
           </a:p>
@@ -21817,7 +21825,7 @@
               <a:buAutoNum type="arabicPeriod"/>
             </a:pPr>
             <a:r>
-              <a:rPr lang="en-IN" sz="2100"/>
+              <a:rPr lang="en-IN" sz="2100" dirty="0"/>
               <a:t>Negotiate stricter cancellation terms with high-volume OTA partners</a:t>
             </a:r>
           </a:p>
@@ -21827,7 +21835,7 @@
               <a:buAutoNum type="arabicPeriod"/>
             </a:pPr>
             <a:r>
-              <a:rPr lang="en-IN" sz="2100"/>
+              <a:rPr lang="en-IN" sz="2100" dirty="0"/>
               <a:t>Reduce "free cancellation" default visibility for OTA listings where StayWell controls the rate plan.</a:t>
             </a:r>
           </a:p>
@@ -21837,7 +21845,7 @@
               <a:buAutoNum type="arabicPeriod"/>
             </a:pPr>
             <a:r>
-              <a:rPr lang="en-IN" sz="2100"/>
+              <a:rPr lang="en-IN" sz="2100" dirty="0"/>
               <a:t>Loyalty/incentive nudges at booking (small perk for confirming, e.g., free breakfast) to increase commitment — cheaper than losing the room entirely. Also can increase chance to book again.</a:t>
             </a:r>
           </a:p>
@@ -21847,7 +21855,7 @@
               <a:buAutoNum type="arabicPeriod"/>
             </a:pPr>
             <a:r>
-              <a:rPr lang="en-IN" sz="2100"/>
+              <a:rPr lang="en-IN" sz="2100" dirty="0"/>
               <a:t>If we can move X% of Transient bookings toward corporate-style commitment (deposits, contracts), we'd expect cancellation rates to fall toward 18-20%. This is worth a sales push.</a:t>
             </a:r>
           </a:p>
@@ -21856,7 +21864,7 @@
               <a:buFont typeface="Arial" panose="020B0604020202020204" pitchFamily="34" charset="0"/>
               <a:buNone/>
             </a:pPr>
-            <a:endParaRPr lang="en-IN"/>
+            <a:endParaRPr lang="en-IN" dirty="0"/>
           </a:p>
           <a:p>
             <a:pPr marL="0" indent="0">
